--- a/public/pitch-decks/investor-50/pptx/31-land-expand.pptx
+++ b/public/pitch-decks/investor-50/pptx/31-land-expand.pptx
@@ -1878,6 +1878,10 @@
             <a:prstDash val="solid"/>
           </a:ln>
         </p:spPr>
+        <p:txBody>
+          <a:bodyPr/>
+          <a:p/>
+        </p:txBody>
       </p:sp>
       <p:sp>
         <p:nvSpPr>
@@ -1909,7 +1913,7 @@
                   <a:srgbClr val="8B8FA3"/>
                 </a:solidFill>
               </a:rPr>
-              <a:t>Decision Crisis Immunization Infrastructure</a:t>
+              <a:t>Decision Evidence Infrastructure for AI Systems</a:t>
             </a:r>
             <a:endParaRPr lang="en-US" sz="1200" dirty="0"/>
           </a:p>
@@ -2184,6 +2188,10 @@
           </a:solidFill>
           <a:ln/>
         </p:spPr>
+        <p:txBody>
+          <a:bodyPr/>
+          <a:p/>
+        </p:txBody>
       </p:sp>
       <p:sp>
         <p:nvSpPr>
@@ -2242,6 +2250,10 @@
           </a:solidFill>
           <a:ln/>
         </p:spPr>
+        <p:txBody>
+          <a:bodyPr/>
+          <a:p/>
+        </p:txBody>
       </p:sp>
       <p:sp>
         <p:nvSpPr>
@@ -2300,6 +2312,10 @@
           </a:solidFill>
           <a:ln/>
         </p:spPr>
+        <p:txBody>
+          <a:bodyPr/>
+          <a:p/>
+        </p:txBody>
       </p:sp>
       <p:sp>
         <p:nvSpPr>
@@ -2358,6 +2374,10 @@
           </a:solidFill>
           <a:ln/>
         </p:spPr>
+        <p:txBody>
+          <a:bodyPr/>
+          <a:p/>
+        </p:txBody>
       </p:sp>
       <p:sp>
         <p:nvSpPr>
@@ -2628,6 +2648,10 @@
           </a:solidFill>
           <a:ln/>
         </p:spPr>
+        <p:txBody>
+          <a:bodyPr/>
+          <a:p/>
+        </p:txBody>
       </p:sp>
       <p:sp>
         <p:nvSpPr>
@@ -2722,6 +2746,10 @@
           </a:solidFill>
           <a:ln/>
         </p:spPr>
+        <p:txBody>
+          <a:bodyPr/>
+          <a:p/>
+        </p:txBody>
       </p:sp>
       <p:sp>
         <p:nvSpPr>
@@ -2816,6 +2844,10 @@
           </a:solidFill>
           <a:ln/>
         </p:spPr>
+        <p:txBody>
+          <a:bodyPr/>
+          <a:p/>
+        </p:txBody>
       </p:sp>
       <p:sp>
         <p:nvSpPr>
@@ -2910,6 +2942,10 @@
           </a:solidFill>
           <a:ln/>
         </p:spPr>
+        <p:txBody>
+          <a:bodyPr/>
+          <a:p/>
+        </p:txBody>
       </p:sp>
       <p:sp>
         <p:nvSpPr>
@@ -3579,6 +3615,10 @@
           </a:solidFill>
           <a:ln/>
         </p:spPr>
+        <p:txBody>
+          <a:bodyPr/>
+          <a:p/>
+        </p:txBody>
       </p:sp>
       <p:sp>
         <p:nvSpPr>
@@ -4000,6 +4040,10 @@
           </a:solidFill>
           <a:ln/>
         </p:spPr>
+        <p:txBody>
+          <a:bodyPr/>
+          <a:p/>
+        </p:txBody>
       </p:sp>
       <p:sp>
         <p:nvSpPr>
@@ -4512,6 +4556,10 @@
           </a:solidFill>
           <a:ln/>
         </p:spPr>
+        <p:txBody>
+          <a:bodyPr/>
+          <a:p/>
+        </p:txBody>
       </p:sp>
       <p:sp>
         <p:nvSpPr>
@@ -4821,6 +4869,10 @@
           </a:solidFill>
           <a:ln/>
         </p:spPr>
+        <p:txBody>
+          <a:bodyPr/>
+          <a:p/>
+        </p:txBody>
       </p:sp>
       <p:sp>
         <p:nvSpPr>
@@ -4918,6 +4970,10 @@
           </a:solidFill>
           <a:ln/>
         </p:spPr>
+        <p:txBody>
+          <a:bodyPr/>
+          <a:p/>
+        </p:txBody>
       </p:sp>
       <p:sp>
         <p:nvSpPr>
@@ -4988,7 +5044,7 @@
                   <a:srgbClr val="8B8FA3"/>
                 </a:solidFill>
               </a:rPr>
-              <a:t>2 warm enterprise intros (financial institution, Big 4 channel). NVIDIA Inception.</a:t>
+              <a:t>Active enterprise design-partner conversations (financial institution, Big 4 channel). NVIDIA Inception.</a:t>
             </a:r>
             <a:endParaRPr lang="en-US" sz="1100" dirty="0"/>
           </a:p>
@@ -5015,6 +5071,10 @@
           </a:solidFill>
           <a:ln/>
         </p:spPr>
+        <p:txBody>
+          <a:bodyPr/>
+          <a:p/>
+        </p:txBody>
       </p:sp>
       <p:sp>
         <p:nvSpPr>
@@ -5085,7 +5145,7 @@
                   <a:srgbClr val="8B8FA3"/>
                 </a:solidFill>
               </a:rPr>
-              <a:t>GTM hiring, SOC 2 Type II certification, first enterprise pilots.</a:t>
+              <a:t>First 3 design partners signed, SOC 2 Type II certification, regulatory validation (EU AI Act compliance audit).</a:t>
             </a:r>
             <a:endParaRPr lang="en-US" sz="1100" dirty="0"/>
           </a:p>
